--- a/对话数据流架构.pptx
+++ b/对话数据流架构.pptx
@@ -2449,7 +2449,7 @@
                 <a:ea typeface="Arial" pitchFamily="34" charset="-122"/>
                 <a:cs typeface="Arial" pitchFamily="34" charset="-120"/>
               </a:rPr>
-              <a:t>MCP 服务</a:t>
+              <a:t>工具技能服务</a:t>
             </a:r>
             <a:endParaRPr lang="en-US" sz="2200" dirty="0"/>
           </a:p>
@@ -2488,7 +2488,7 @@
                 <a:ea typeface="Arial" pitchFamily="34" charset="-122"/>
                 <a:cs typeface="Arial" pitchFamily="34" charset="-120"/>
               </a:rPr>
-              <a:t>MODEL CONTEXT PROTOCOL SERVICES</a:t>
+              <a:t>TOOL SKILLS — ON-DEMAND SUBPROCESSES</a:t>
             </a:r>
             <a:endParaRPr lang="en-US" sz="1100" dirty="0"/>
           </a:p>
@@ -2525,12 +2525,12 @@
         </p:nvSpPr>
         <p:spPr>
           <a:xfrm>
-            <a:off x="365760" y="1188720"/>
-            <a:ext cx="1554480" cy="2377440"/>
+            <a:off x="228600" y="1188720"/>
+            <a:ext cx="1600200" cy="2377440"/>
           </a:xfrm>
           <a:prstGeom prst="roundRect">
             <a:avLst>
-              <a:gd name="adj" fmla="val 4706"/>
+              <a:gd name="adj" fmla="val 4571"/>
             </a:avLst>
           </a:prstGeom>
           <a:solidFill>
@@ -2552,14 +2552,14 @@
         </p:nvSpPr>
         <p:spPr>
           <a:xfrm>
-            <a:off x="365760" y="1188720"/>
-            <a:ext cx="1554480" cy="54864"/>
+            <a:off x="228600" y="1188720"/>
+            <a:ext cx="1600200" cy="54864"/>
           </a:xfrm>
           <a:prstGeom prst="rect">
             <a:avLst/>
           </a:prstGeom>
           <a:solidFill>
-            <a:srgbClr val="58A6FF"/>
+            <a:srgbClr val="00F7FF"/>
           </a:solidFill>
           <a:ln/>
         </p:spPr>
@@ -2572,8 +2572,8 @@
         </p:nvSpPr>
         <p:spPr>
           <a:xfrm>
-            <a:off x="457200" y="1371600"/>
-            <a:ext cx="1371600" cy="365760"/>
+            <a:off x="320040" y="1371600"/>
+            <a:ext cx="1417320" cy="365760"/>
           </a:xfrm>
           <a:prstGeom prst="rect">
             <a:avLst/>
@@ -2591,13 +2591,13 @@
             <a:r>
               <a:rPr lang="en-US" sz="1600" b="1" dirty="0">
                 <a:solidFill>
-                  <a:srgbClr val="58A6FF"/>
-                </a:solidFill>
-                <a:latin typeface="Arial" pitchFamily="34" charset="0"/>
-                <a:ea typeface="Arial" pitchFamily="34" charset="-122"/>
-                <a:cs typeface="Arial" pitchFamily="34" charset="-120"/>
-              </a:rPr>
-              <a:t>docx</a:t>
+                  <a:srgbClr val="00F7FF"/>
+                </a:solidFill>
+                <a:latin typeface="Arial" pitchFamily="34" charset="0"/>
+                <a:ea typeface="Arial" pitchFamily="34" charset="-122"/>
+                <a:cs typeface="Arial" pitchFamily="34" charset="-120"/>
+              </a:rPr>
+              <a:t>browser</a:t>
             </a:r>
             <a:endParaRPr lang="en-US" sz="1600" dirty="0"/>
           </a:p>
@@ -2611,8 +2611,8 @@
         </p:nvSpPr>
         <p:spPr>
           <a:xfrm>
-            <a:off x="457200" y="1828800"/>
-            <a:ext cx="1371600" cy="548640"/>
+            <a:off x="320040" y="1828800"/>
+            <a:ext cx="1417320" cy="457200"/>
           </a:xfrm>
           <a:prstGeom prst="rect">
             <a:avLst/>
@@ -2636,7 +2636,7 @@
                 <a:ea typeface="Arial" pitchFamily="34" charset="-122"/>
                 <a:cs typeface="Arial" pitchFamily="34" charset="-120"/>
               </a:rPr>
-              <a:t>Word 文档生成/编辑</a:t>
+              <a:t>浏览器自动化</a:t>
             </a:r>
             <a:endParaRPr lang="en-US" sz="1000" dirty="0"/>
           </a:p>
@@ -2650,8 +2650,8 @@
         </p:nvSpPr>
         <p:spPr>
           <a:xfrm>
-            <a:off x="457200" y="2468880"/>
-            <a:ext cx="1371600" cy="731520"/>
+            <a:off x="320040" y="2377440"/>
+            <a:ext cx="1417320" cy="548640"/>
           </a:xfrm>
           <a:prstGeom prst="rect">
             <a:avLst/>
@@ -2667,7 +2667,7 @@
               <a:buNone/>
             </a:pPr>
             <a:r>
-              <a:rPr lang="en-US" sz="900" dirty="0">
+              <a:rPr lang="en-US" sz="800" dirty="0">
                 <a:solidFill>
                   <a:srgbClr val="8B949E"/>
                 </a:solidFill>
@@ -2675,9 +2675,9 @@
                 <a:ea typeface="Arial" pitchFamily="34" charset="-122"/>
                 <a:cs typeface="Arial" pitchFamily="34" charset="-120"/>
               </a:rPr>
-              <a:t>Python (python-docx, OOXML)</a:t>
-            </a:r>
-            <a:endParaRPr lang="en-US" sz="900" dirty="0"/>
+              <a:t>CDP 端点 127.0.0.1:8088</a:t>
+            </a:r>
+            <a:endParaRPr lang="en-US" sz="800" dirty="0"/>
           </a:p>
         </p:txBody>
       </p:sp>
@@ -2689,12 +2689,78 @@
         </p:nvSpPr>
         <p:spPr>
           <a:xfrm>
-            <a:off x="2103120" y="1188720"/>
-            <a:ext cx="1554480" cy="2377440"/>
+            <a:off x="320040" y="3108960"/>
+            <a:ext cx="914400" cy="256032"/>
           </a:xfrm>
           <a:prstGeom prst="roundRect">
             <a:avLst>
-              <a:gd name="adj" fmla="val 4706"/>
+              <a:gd name="adj" fmla="val 14286"/>
+            </a:avLst>
+          </a:prstGeom>
+          <a:solidFill>
+            <a:srgbClr val="000000"/>
+          </a:solidFill>
+          <a:ln w="6350">
+            <a:solidFill>
+              <a:srgbClr val="00F7FF"/>
+            </a:solidFill>
+            <a:prstDash val="solid"/>
+          </a:ln>
+        </p:spPr>
+      </p:sp>
+      <p:sp>
+        <p:nvSpPr>
+          <p:cNvPr id="12" name="Text 10"/>
+          <p:cNvSpPr/>
+          <p:nvPr/>
+        </p:nvSpPr>
+        <p:spPr>
+          <a:xfrm>
+            <a:off x="320040" y="3108960"/>
+            <a:ext cx="914400" cy="256032"/>
+          </a:xfrm>
+          <a:prstGeom prst="rect">
+            <a:avLst/>
+          </a:prstGeom>
+          <a:noFill/>
+          <a:ln/>
+        </p:spPr>
+        <p:txBody>
+          <a:bodyPr wrap="square" lIns="0" tIns="0" rIns="0" bIns="0" rtlCol="0" anchor="ctr"/>
+          <a:lstStyle/>
+          <a:p>
+            <a:pPr algn="ctr" indent="0" marL="0">
+              <a:buNone/>
+            </a:pPr>
+            <a:r>
+              <a:rPr lang="en-US" sz="900" dirty="0">
+                <a:solidFill>
+                  <a:srgbClr val="00F7FF"/>
+                </a:solidFill>
+                <a:latin typeface="Arial" pitchFamily="34" charset="0"/>
+                <a:ea typeface="Arial" pitchFamily="34" charset="-122"/>
+                <a:cs typeface="Arial" pitchFamily="34" charset="-120"/>
+              </a:rPr>
+              <a:t>按需调用</a:t>
+            </a:r>
+            <a:endParaRPr lang="en-US" sz="900" dirty="0"/>
+          </a:p>
+        </p:txBody>
+      </p:sp>
+      <p:sp>
+        <p:nvSpPr>
+          <p:cNvPr id="13" name="Shape 11"/>
+          <p:cNvSpPr/>
+          <p:nvPr/>
+        </p:nvSpPr>
+        <p:spPr>
+          <a:xfrm>
+            <a:off x="2011680" y="1188720"/>
+            <a:ext cx="1600200" cy="2377440"/>
+          </a:xfrm>
+          <a:prstGeom prst="roundRect">
+            <a:avLst>
+              <a:gd name="adj" fmla="val 4571"/>
             </a:avLst>
           </a:prstGeom>
           <a:solidFill>
@@ -2710,14 +2776,14 @@
       </p:sp>
       <p:sp>
         <p:nvSpPr>
-          <p:cNvPr id="12" name="Shape 10"/>
-          <p:cNvSpPr/>
-          <p:nvPr/>
-        </p:nvSpPr>
-        <p:spPr>
-          <a:xfrm>
-            <a:off x="2103120" y="1188720"/>
-            <a:ext cx="1554480" cy="54864"/>
+          <p:cNvPr id="14" name="Shape 12"/>
+          <p:cNvSpPr/>
+          <p:nvPr/>
+        </p:nvSpPr>
+        <p:spPr>
+          <a:xfrm>
+            <a:off x="2011680" y="1188720"/>
+            <a:ext cx="1600200" cy="54864"/>
           </a:xfrm>
           <a:prstGeom prst="rect">
             <a:avLst/>
@@ -2730,14 +2796,14 @@
       </p:sp>
       <p:sp>
         <p:nvSpPr>
-          <p:cNvPr id="13" name="Text 11"/>
-          <p:cNvSpPr/>
-          <p:nvPr/>
-        </p:nvSpPr>
-        <p:spPr>
-          <a:xfrm>
-            <a:off x="2194560" y="1371600"/>
-            <a:ext cx="1371600" cy="365760"/>
+          <p:cNvPr id="15" name="Text 13"/>
+          <p:cNvSpPr/>
+          <p:nvPr/>
+        </p:nvSpPr>
+        <p:spPr>
+          <a:xfrm>
+            <a:off x="2103120" y="1371600"/>
+            <a:ext cx="1417320" cy="365760"/>
           </a:xfrm>
           <a:prstGeom prst="rect">
             <a:avLst/>
@@ -2769,14 +2835,14 @@
       </p:sp>
       <p:sp>
         <p:nvSpPr>
-          <p:cNvPr id="14" name="Text 12"/>
-          <p:cNvSpPr/>
-          <p:nvPr/>
-        </p:nvSpPr>
-        <p:spPr>
-          <a:xfrm>
-            <a:off x="2194560" y="1828800"/>
-            <a:ext cx="1371600" cy="548640"/>
+          <p:cNvPr id="16" name="Text 14"/>
+          <p:cNvSpPr/>
+          <p:nvPr/>
+        </p:nvSpPr>
+        <p:spPr>
+          <a:xfrm>
+            <a:off x="2103120" y="1828800"/>
+            <a:ext cx="1417320" cy="457200"/>
           </a:xfrm>
           <a:prstGeom prst="rect">
             <a:avLst/>
@@ -2808,14 +2874,14 @@
       </p:sp>
       <p:sp>
         <p:nvSpPr>
-          <p:cNvPr id="15" name="Text 13"/>
-          <p:cNvSpPr/>
-          <p:nvPr/>
-        </p:nvSpPr>
-        <p:spPr>
-          <a:xfrm>
-            <a:off x="2194560" y="2468880"/>
-            <a:ext cx="1371600" cy="731520"/>
+          <p:cNvPr id="17" name="Text 15"/>
+          <p:cNvSpPr/>
+          <p:nvPr/>
+        </p:nvSpPr>
+        <p:spPr>
+          <a:xfrm>
+            <a:off x="2103120" y="2377440"/>
+            <a:ext cx="1417320" cy="548640"/>
           </a:xfrm>
           <a:prstGeom prst="rect">
             <a:avLst/>
@@ -2831,7 +2897,7 @@
               <a:buNone/>
             </a:pPr>
             <a:r>
-              <a:rPr lang="en-US" sz="900" dirty="0">
+              <a:rPr lang="en-US" sz="800" dirty="0">
                 <a:solidFill>
                   <a:srgbClr val="8B949E"/>
                 </a:solidFill>
@@ -2841,24 +2907,90 @@
               </a:rPr>
               <a:t>Python (PyPDF2, pdfplumber)</a:t>
             </a:r>
-            <a:endParaRPr lang="en-US" sz="900" dirty="0"/>
-          </a:p>
-        </p:txBody>
-      </p:sp>
-      <p:sp>
-        <p:nvSpPr>
-          <p:cNvPr id="16" name="Shape 14"/>
-          <p:cNvSpPr/>
-          <p:nvPr/>
-        </p:nvSpPr>
-        <p:spPr>
-          <a:xfrm>
-            <a:off x="3840480" y="1188720"/>
-            <a:ext cx="1554480" cy="2377440"/>
+            <a:endParaRPr lang="en-US" sz="800" dirty="0"/>
+          </a:p>
+        </p:txBody>
+      </p:sp>
+      <p:sp>
+        <p:nvSpPr>
+          <p:cNvPr id="18" name="Shape 16"/>
+          <p:cNvSpPr/>
+          <p:nvPr/>
+        </p:nvSpPr>
+        <p:spPr>
+          <a:xfrm>
+            <a:off x="2103120" y="3108960"/>
+            <a:ext cx="914400" cy="256032"/>
           </a:xfrm>
           <a:prstGeom prst="roundRect">
             <a:avLst>
-              <a:gd name="adj" fmla="val 4706"/>
+              <a:gd name="adj" fmla="val 14286"/>
+            </a:avLst>
+          </a:prstGeom>
+          <a:solidFill>
+            <a:srgbClr val="000000"/>
+          </a:solidFill>
+          <a:ln w="6350">
+            <a:solidFill>
+              <a:srgbClr val="3FB950"/>
+            </a:solidFill>
+            <a:prstDash val="solid"/>
+          </a:ln>
+        </p:spPr>
+      </p:sp>
+      <p:sp>
+        <p:nvSpPr>
+          <p:cNvPr id="19" name="Text 17"/>
+          <p:cNvSpPr/>
+          <p:nvPr/>
+        </p:nvSpPr>
+        <p:spPr>
+          <a:xfrm>
+            <a:off x="2103120" y="3108960"/>
+            <a:ext cx="914400" cy="256032"/>
+          </a:xfrm>
+          <a:prstGeom prst="rect">
+            <a:avLst/>
+          </a:prstGeom>
+          <a:noFill/>
+          <a:ln/>
+        </p:spPr>
+        <p:txBody>
+          <a:bodyPr wrap="square" lIns="0" tIns="0" rIns="0" bIns="0" rtlCol="0" anchor="ctr"/>
+          <a:lstStyle/>
+          <a:p>
+            <a:pPr algn="ctr" indent="0" marL="0">
+              <a:buNone/>
+            </a:pPr>
+            <a:r>
+              <a:rPr lang="en-US" sz="900" dirty="0">
+                <a:solidFill>
+                  <a:srgbClr val="3FB950"/>
+                </a:solidFill>
+                <a:latin typeface="Arial" pitchFamily="34" charset="0"/>
+                <a:ea typeface="Arial" pitchFamily="34" charset="-122"/>
+                <a:cs typeface="Arial" pitchFamily="34" charset="-120"/>
+              </a:rPr>
+              <a:t>子进程</a:t>
+            </a:r>
+            <a:endParaRPr lang="en-US" sz="900" dirty="0"/>
+          </a:p>
+        </p:txBody>
+      </p:sp>
+      <p:sp>
+        <p:nvSpPr>
+          <p:cNvPr id="20" name="Shape 18"/>
+          <p:cNvSpPr/>
+          <p:nvPr/>
+        </p:nvSpPr>
+        <p:spPr>
+          <a:xfrm>
+            <a:off x="3794760" y="1188720"/>
+            <a:ext cx="1600200" cy="2377440"/>
+          </a:xfrm>
+          <a:prstGeom prst="roundRect">
+            <a:avLst>
+              <a:gd name="adj" fmla="val 4571"/>
             </a:avLst>
           </a:prstGeom>
           <a:solidFill>
@@ -2874,34 +3006,34 @@
       </p:sp>
       <p:sp>
         <p:nvSpPr>
-          <p:cNvPr id="17" name="Shape 15"/>
-          <p:cNvSpPr/>
-          <p:nvPr/>
-        </p:nvSpPr>
-        <p:spPr>
-          <a:xfrm>
-            <a:off x="3840480" y="1188720"/>
-            <a:ext cx="1554480" cy="54864"/>
+          <p:cNvPr id="21" name="Shape 19"/>
+          <p:cNvSpPr/>
+          <p:nvPr/>
+        </p:nvSpPr>
+        <p:spPr>
+          <a:xfrm>
+            <a:off x="3794760" y="1188720"/>
+            <a:ext cx="1600200" cy="54864"/>
           </a:xfrm>
           <a:prstGeom prst="rect">
             <a:avLst/>
           </a:prstGeom>
           <a:solidFill>
-            <a:srgbClr val="D29922"/>
+            <a:srgbClr val="58A6FF"/>
           </a:solidFill>
           <a:ln/>
         </p:spPr>
       </p:sp>
       <p:sp>
         <p:nvSpPr>
-          <p:cNvPr id="18" name="Text 16"/>
-          <p:cNvSpPr/>
-          <p:nvPr/>
-        </p:nvSpPr>
-        <p:spPr>
-          <a:xfrm>
-            <a:off x="3931920" y="1371600"/>
-            <a:ext cx="1371600" cy="365760"/>
+          <p:cNvPr id="22" name="Text 20"/>
+          <p:cNvSpPr/>
+          <p:nvPr/>
+        </p:nvSpPr>
+        <p:spPr>
+          <a:xfrm>
+            <a:off x="3886200" y="1371600"/>
+            <a:ext cx="1417320" cy="365760"/>
           </a:xfrm>
           <a:prstGeom prst="rect">
             <a:avLst/>
@@ -2919,13 +3051,13 @@
             <a:r>
               <a:rPr lang="en-US" sz="1600" b="1" dirty="0">
                 <a:solidFill>
-                  <a:srgbClr val="D29922"/>
-                </a:solidFill>
-                <a:latin typeface="Arial" pitchFamily="34" charset="0"/>
-                <a:ea typeface="Arial" pitchFamily="34" charset="-122"/>
-                <a:cs typeface="Arial" pitchFamily="34" charset="-120"/>
-              </a:rPr>
-              <a:t>pptx</a:t>
+                  <a:srgbClr val="58A6FF"/>
+                </a:solidFill>
+                <a:latin typeface="Arial" pitchFamily="34" charset="0"/>
+                <a:ea typeface="Arial" pitchFamily="34" charset="-122"/>
+                <a:cs typeface="Arial" pitchFamily="34" charset="-120"/>
+              </a:rPr>
+              <a:t>docx</a:t>
             </a:r>
             <a:endParaRPr lang="en-US" sz="1600" dirty="0"/>
           </a:p>
@@ -2933,14 +3065,14 @@
       </p:sp>
       <p:sp>
         <p:nvSpPr>
-          <p:cNvPr id="19" name="Text 17"/>
-          <p:cNvSpPr/>
-          <p:nvPr/>
-        </p:nvSpPr>
-        <p:spPr>
-          <a:xfrm>
-            <a:off x="3931920" y="1828800"/>
-            <a:ext cx="1371600" cy="548640"/>
+          <p:cNvPr id="23" name="Text 21"/>
+          <p:cNvSpPr/>
+          <p:nvPr/>
+        </p:nvSpPr>
+        <p:spPr>
+          <a:xfrm>
+            <a:off x="3886200" y="1828800"/>
+            <a:ext cx="1417320" cy="457200"/>
           </a:xfrm>
           <a:prstGeom prst="rect">
             <a:avLst/>
@@ -2964,7 +3096,7 @@
                 <a:ea typeface="Arial" pitchFamily="34" charset="-122"/>
                 <a:cs typeface="Arial" pitchFamily="34" charset="-120"/>
               </a:rPr>
-              <a:t>PPT 幻灯片生成/设计</a:t>
+              <a:t>Word 文档生成/编辑</a:t>
             </a:r>
             <a:endParaRPr lang="en-US" sz="1000" dirty="0"/>
           </a:p>
@@ -2972,14 +3104,14 @@
       </p:sp>
       <p:sp>
         <p:nvSpPr>
-          <p:cNvPr id="20" name="Text 18"/>
-          <p:cNvSpPr/>
-          <p:nvPr/>
-        </p:nvSpPr>
-        <p:spPr>
-          <a:xfrm>
-            <a:off x="3931920" y="2468880"/>
-            <a:ext cx="1371600" cy="731520"/>
+          <p:cNvPr id="24" name="Text 22"/>
+          <p:cNvSpPr/>
+          <p:nvPr/>
+        </p:nvSpPr>
+        <p:spPr>
+          <a:xfrm>
+            <a:off x="3886200" y="2377440"/>
+            <a:ext cx="1417320" cy="548640"/>
           </a:xfrm>
           <a:prstGeom prst="rect">
             <a:avLst/>
@@ -2995,7 +3127,7 @@
               <a:buNone/>
             </a:pPr>
             <a:r>
-              <a:rPr lang="en-US" sz="900" dirty="0">
+              <a:rPr lang="en-US" sz="800" dirty="0">
                 <a:solidFill>
                   <a:srgbClr val="8B949E"/>
                 </a:solidFill>
@@ -3003,26 +3135,92 @@
                 <a:ea typeface="Arial" pitchFamily="34" charset="-122"/>
                 <a:cs typeface="Arial" pitchFamily="34" charset="-120"/>
               </a:rPr>
-              <a:t>Python + pptxgenjs (Node.js)</a:t>
-            </a:r>
-            <a:endParaRPr lang="en-US" sz="900" dirty="0"/>
-          </a:p>
-        </p:txBody>
-      </p:sp>
-      <p:sp>
-        <p:nvSpPr>
-          <p:cNvPr id="21" name="Shape 19"/>
-          <p:cNvSpPr/>
-          <p:nvPr/>
-        </p:nvSpPr>
-        <p:spPr>
-          <a:xfrm>
-            <a:off x="5577840" y="1188720"/>
-            <a:ext cx="1554480" cy="2377440"/>
+              <a:t>Python (python-docx, OOXML)</a:t>
+            </a:r>
+            <a:endParaRPr lang="en-US" sz="800" dirty="0"/>
+          </a:p>
+        </p:txBody>
+      </p:sp>
+      <p:sp>
+        <p:nvSpPr>
+          <p:cNvPr id="25" name="Shape 23"/>
+          <p:cNvSpPr/>
+          <p:nvPr/>
+        </p:nvSpPr>
+        <p:spPr>
+          <a:xfrm>
+            <a:off x="3886200" y="3108960"/>
+            <a:ext cx="914400" cy="256032"/>
           </a:xfrm>
           <a:prstGeom prst="roundRect">
             <a:avLst>
-              <a:gd name="adj" fmla="val 4706"/>
+              <a:gd name="adj" fmla="val 14286"/>
+            </a:avLst>
+          </a:prstGeom>
+          <a:solidFill>
+            <a:srgbClr val="000000"/>
+          </a:solidFill>
+          <a:ln w="6350">
+            <a:solidFill>
+              <a:srgbClr val="58A6FF"/>
+            </a:solidFill>
+            <a:prstDash val="solid"/>
+          </a:ln>
+        </p:spPr>
+      </p:sp>
+      <p:sp>
+        <p:nvSpPr>
+          <p:cNvPr id="26" name="Text 24"/>
+          <p:cNvSpPr/>
+          <p:nvPr/>
+        </p:nvSpPr>
+        <p:spPr>
+          <a:xfrm>
+            <a:off x="3886200" y="3108960"/>
+            <a:ext cx="914400" cy="256032"/>
+          </a:xfrm>
+          <a:prstGeom prst="rect">
+            <a:avLst/>
+          </a:prstGeom>
+          <a:noFill/>
+          <a:ln/>
+        </p:spPr>
+        <p:txBody>
+          <a:bodyPr wrap="square" lIns="0" tIns="0" rIns="0" bIns="0" rtlCol="0" anchor="ctr"/>
+          <a:lstStyle/>
+          <a:p>
+            <a:pPr algn="ctr" indent="0" marL="0">
+              <a:buNone/>
+            </a:pPr>
+            <a:r>
+              <a:rPr lang="en-US" sz="900" dirty="0">
+                <a:solidFill>
+                  <a:srgbClr val="58A6FF"/>
+                </a:solidFill>
+                <a:latin typeface="Arial" pitchFamily="34" charset="0"/>
+                <a:ea typeface="Arial" pitchFamily="34" charset="-122"/>
+                <a:cs typeface="Arial" pitchFamily="34" charset="-120"/>
+              </a:rPr>
+              <a:t>子进程</a:t>
+            </a:r>
+            <a:endParaRPr lang="en-US" sz="900" dirty="0"/>
+          </a:p>
+        </p:txBody>
+      </p:sp>
+      <p:sp>
+        <p:nvSpPr>
+          <p:cNvPr id="27" name="Shape 25"/>
+          <p:cNvSpPr/>
+          <p:nvPr/>
+        </p:nvSpPr>
+        <p:spPr>
+          <a:xfrm>
+            <a:off x="5577840" y="1188720"/>
+            <a:ext cx="1600200" cy="2377440"/>
+          </a:xfrm>
+          <a:prstGeom prst="roundRect">
+            <a:avLst>
+              <a:gd name="adj" fmla="val 4571"/>
             </a:avLst>
           </a:prstGeom>
           <a:solidFill>
@@ -3038,34 +3236,34 @@
       </p:sp>
       <p:sp>
         <p:nvSpPr>
-          <p:cNvPr id="22" name="Shape 20"/>
+          <p:cNvPr id="28" name="Shape 26"/>
           <p:cNvSpPr/>
           <p:nvPr/>
         </p:nvSpPr>
         <p:spPr>
           <a:xfrm>
             <a:off x="5577840" y="1188720"/>
-            <a:ext cx="1554480" cy="54864"/>
+            <a:ext cx="1600200" cy="54864"/>
           </a:xfrm>
           <a:prstGeom prst="rect">
             <a:avLst/>
           </a:prstGeom>
           <a:solidFill>
-            <a:srgbClr val="F85149"/>
+            <a:srgbClr val="D29922"/>
           </a:solidFill>
           <a:ln/>
         </p:spPr>
       </p:sp>
       <p:sp>
         <p:nvSpPr>
-          <p:cNvPr id="23" name="Text 21"/>
+          <p:cNvPr id="29" name="Text 27"/>
           <p:cNvSpPr/>
           <p:nvPr/>
         </p:nvSpPr>
         <p:spPr>
           <a:xfrm>
             <a:off x="5669280" y="1371600"/>
-            <a:ext cx="1371600" cy="365760"/>
+            <a:ext cx="1417320" cy="365760"/>
           </a:xfrm>
           <a:prstGeom prst="rect">
             <a:avLst/>
@@ -3083,13 +3281,13 @@
             <a:r>
               <a:rPr lang="en-US" sz="1600" b="1" dirty="0">
                 <a:solidFill>
-                  <a:srgbClr val="F85149"/>
-                </a:solidFill>
-                <a:latin typeface="Arial" pitchFamily="34" charset="0"/>
-                <a:ea typeface="Arial" pitchFamily="34" charset="-122"/>
-                <a:cs typeface="Arial" pitchFamily="34" charset="-120"/>
-              </a:rPr>
-              <a:t>xlsx</a:t>
+                  <a:srgbClr val="D29922"/>
+                </a:solidFill>
+                <a:latin typeface="Arial" pitchFamily="34" charset="0"/>
+                <a:ea typeface="Arial" pitchFamily="34" charset="-122"/>
+                <a:cs typeface="Arial" pitchFamily="34" charset="-120"/>
+              </a:rPr>
+              <a:t>pptx</a:t>
             </a:r>
             <a:endParaRPr lang="en-US" sz="1600" dirty="0"/>
           </a:p>
@@ -3097,14 +3295,14 @@
       </p:sp>
       <p:sp>
         <p:nvSpPr>
-          <p:cNvPr id="24" name="Text 22"/>
+          <p:cNvPr id="30" name="Text 28"/>
           <p:cNvSpPr/>
           <p:nvPr/>
         </p:nvSpPr>
         <p:spPr>
           <a:xfrm>
             <a:off x="5669280" y="1828800"/>
-            <a:ext cx="1371600" cy="548640"/>
+            <a:ext cx="1417320" cy="457200"/>
           </a:xfrm>
           <a:prstGeom prst="rect">
             <a:avLst/>
@@ -3128,7 +3326,7 @@
                 <a:ea typeface="Arial" pitchFamily="34" charset="-122"/>
                 <a:cs typeface="Arial" pitchFamily="34" charset="-120"/>
               </a:rPr>
-              <a:t>Excel 电子表格操作</a:t>
+              <a:t>PPT 幻灯片生成/设计</a:t>
             </a:r>
             <a:endParaRPr lang="en-US" sz="1000" dirty="0"/>
           </a:p>
@@ -3136,14 +3334,14 @@
       </p:sp>
       <p:sp>
         <p:nvSpPr>
-          <p:cNvPr id="25" name="Text 23"/>
-          <p:cNvSpPr/>
-          <p:nvPr/>
-        </p:nvSpPr>
-        <p:spPr>
-          <a:xfrm>
-            <a:off x="5669280" y="2468880"/>
-            <a:ext cx="1371600" cy="731520"/>
+          <p:cNvPr id="31" name="Text 29"/>
+          <p:cNvSpPr/>
+          <p:nvPr/>
+        </p:nvSpPr>
+        <p:spPr>
+          <a:xfrm>
+            <a:off x="5669280" y="2377440"/>
+            <a:ext cx="1417320" cy="548640"/>
           </a:xfrm>
           <a:prstGeom prst="rect">
             <a:avLst/>
@@ -3159,7 +3357,7 @@
               <a:buNone/>
             </a:pPr>
             <a:r>
-              <a:rPr lang="en-US" sz="900" dirty="0">
+              <a:rPr lang="en-US" sz="800" dirty="0">
                 <a:solidFill>
                   <a:srgbClr val="8B949E"/>
                 </a:solidFill>
@@ -3167,26 +3365,92 @@
                 <a:ea typeface="Arial" pitchFamily="34" charset="-122"/>
                 <a:cs typeface="Arial" pitchFamily="34" charset="-120"/>
               </a:rPr>
-              <a:t>Python (openpyxl)</a:t>
-            </a:r>
-            <a:endParaRPr lang="en-US" sz="900" dirty="0"/>
-          </a:p>
-        </p:txBody>
-      </p:sp>
-      <p:sp>
-        <p:nvSpPr>
-          <p:cNvPr id="26" name="Shape 24"/>
-          <p:cNvSpPr/>
-          <p:nvPr/>
-        </p:nvSpPr>
-        <p:spPr>
-          <a:xfrm>
-            <a:off x="7315200" y="1188720"/>
-            <a:ext cx="1554480" cy="2377440"/>
+              <a:t>Python + pptxgenjs (Node.js)</a:t>
+            </a:r>
+            <a:endParaRPr lang="en-US" sz="800" dirty="0"/>
+          </a:p>
+        </p:txBody>
+      </p:sp>
+      <p:sp>
+        <p:nvSpPr>
+          <p:cNvPr id="32" name="Shape 30"/>
+          <p:cNvSpPr/>
+          <p:nvPr/>
+        </p:nvSpPr>
+        <p:spPr>
+          <a:xfrm>
+            <a:off x="5669280" y="3108960"/>
+            <a:ext cx="914400" cy="256032"/>
           </a:xfrm>
           <a:prstGeom prst="roundRect">
             <a:avLst>
-              <a:gd name="adj" fmla="val 4706"/>
+              <a:gd name="adj" fmla="val 14286"/>
+            </a:avLst>
+          </a:prstGeom>
+          <a:solidFill>
+            <a:srgbClr val="000000"/>
+          </a:solidFill>
+          <a:ln w="6350">
+            <a:solidFill>
+              <a:srgbClr val="D29922"/>
+            </a:solidFill>
+            <a:prstDash val="solid"/>
+          </a:ln>
+        </p:spPr>
+      </p:sp>
+      <p:sp>
+        <p:nvSpPr>
+          <p:cNvPr id="33" name="Text 31"/>
+          <p:cNvSpPr/>
+          <p:nvPr/>
+        </p:nvSpPr>
+        <p:spPr>
+          <a:xfrm>
+            <a:off x="5669280" y="3108960"/>
+            <a:ext cx="914400" cy="256032"/>
+          </a:xfrm>
+          <a:prstGeom prst="rect">
+            <a:avLst/>
+          </a:prstGeom>
+          <a:noFill/>
+          <a:ln/>
+        </p:spPr>
+        <p:txBody>
+          <a:bodyPr wrap="square" lIns="0" tIns="0" rIns="0" bIns="0" rtlCol="0" anchor="ctr"/>
+          <a:lstStyle/>
+          <a:p>
+            <a:pPr algn="ctr" indent="0" marL="0">
+              <a:buNone/>
+            </a:pPr>
+            <a:r>
+              <a:rPr lang="en-US" sz="900" dirty="0">
+                <a:solidFill>
+                  <a:srgbClr val="D29922"/>
+                </a:solidFill>
+                <a:latin typeface="Arial" pitchFamily="34" charset="0"/>
+                <a:ea typeface="Arial" pitchFamily="34" charset="-122"/>
+                <a:cs typeface="Arial" pitchFamily="34" charset="-120"/>
+              </a:rPr>
+              <a:t>子进程</a:t>
+            </a:r>
+            <a:endParaRPr lang="en-US" sz="900" dirty="0"/>
+          </a:p>
+        </p:txBody>
+      </p:sp>
+      <p:sp>
+        <p:nvSpPr>
+          <p:cNvPr id="34" name="Shape 32"/>
+          <p:cNvSpPr/>
+          <p:nvPr/>
+        </p:nvSpPr>
+        <p:spPr>
+          <a:xfrm>
+            <a:off x="7360920" y="1188720"/>
+            <a:ext cx="1600200" cy="2377440"/>
+          </a:xfrm>
+          <a:prstGeom prst="roundRect">
+            <a:avLst>
+              <a:gd name="adj" fmla="val 4571"/>
             </a:avLst>
           </a:prstGeom>
           <a:solidFill>
@@ -3202,34 +3466,34 @@
       </p:sp>
       <p:sp>
         <p:nvSpPr>
-          <p:cNvPr id="27" name="Shape 25"/>
-          <p:cNvSpPr/>
-          <p:nvPr/>
-        </p:nvSpPr>
-        <p:spPr>
-          <a:xfrm>
-            <a:off x="7315200" y="1188720"/>
-            <a:ext cx="1554480" cy="54864"/>
+          <p:cNvPr id="35" name="Shape 33"/>
+          <p:cNvSpPr/>
+          <p:nvPr/>
+        </p:nvSpPr>
+        <p:spPr>
+          <a:xfrm>
+            <a:off x="7360920" y="1188720"/>
+            <a:ext cx="1600200" cy="54864"/>
           </a:xfrm>
           <a:prstGeom prst="rect">
             <a:avLst/>
           </a:prstGeom>
           <a:solidFill>
-            <a:srgbClr val="00F7FF"/>
+            <a:srgbClr val="F85149"/>
           </a:solidFill>
           <a:ln/>
         </p:spPr>
       </p:sp>
       <p:sp>
         <p:nvSpPr>
-          <p:cNvPr id="28" name="Text 26"/>
-          <p:cNvSpPr/>
-          <p:nvPr/>
-        </p:nvSpPr>
-        <p:spPr>
-          <a:xfrm>
-            <a:off x="7406640" y="1371600"/>
-            <a:ext cx="1371600" cy="365760"/>
+          <p:cNvPr id="36" name="Text 34"/>
+          <p:cNvSpPr/>
+          <p:nvPr/>
+        </p:nvSpPr>
+        <p:spPr>
+          <a:xfrm>
+            <a:off x="7452360" y="1371600"/>
+            <a:ext cx="1417320" cy="365760"/>
           </a:xfrm>
           <a:prstGeom prst="rect">
             <a:avLst/>
@@ -3247,13 +3511,13 @@
             <a:r>
               <a:rPr lang="en-US" sz="1600" b="1" dirty="0">
                 <a:solidFill>
-                  <a:srgbClr val="00F7FF"/>
-                </a:solidFill>
-                <a:latin typeface="Arial" pitchFamily="34" charset="0"/>
-                <a:ea typeface="Arial" pitchFamily="34" charset="-122"/>
-                <a:cs typeface="Arial" pitchFamily="34" charset="-120"/>
-              </a:rPr>
-              <a:t>browser</a:t>
+                  <a:srgbClr val="F85149"/>
+                </a:solidFill>
+                <a:latin typeface="Arial" pitchFamily="34" charset="0"/>
+                <a:ea typeface="Arial" pitchFamily="34" charset="-122"/>
+                <a:cs typeface="Arial" pitchFamily="34" charset="-120"/>
+              </a:rPr>
+              <a:t>xlsx</a:t>
             </a:r>
             <a:endParaRPr lang="en-US" sz="1600" dirty="0"/>
           </a:p>
@@ -3261,14 +3525,14 @@
       </p:sp>
       <p:sp>
         <p:nvSpPr>
-          <p:cNvPr id="29" name="Text 27"/>
-          <p:cNvSpPr/>
-          <p:nvPr/>
-        </p:nvSpPr>
-        <p:spPr>
-          <a:xfrm>
-            <a:off x="7406640" y="1828800"/>
-            <a:ext cx="1371600" cy="548640"/>
+          <p:cNvPr id="37" name="Text 35"/>
+          <p:cNvSpPr/>
+          <p:nvPr/>
+        </p:nvSpPr>
+        <p:spPr>
+          <a:xfrm>
+            <a:off x="7452360" y="1828800"/>
+            <a:ext cx="1417320" cy="457200"/>
           </a:xfrm>
           <a:prstGeom prst="rect">
             <a:avLst/>
@@ -3292,7 +3556,7 @@
                 <a:ea typeface="Arial" pitchFamily="34" charset="-122"/>
                 <a:cs typeface="Arial" pitchFamily="34" charset="-120"/>
               </a:rPr>
-              <a:t>浏览器自动化</a:t>
+              <a:t>Excel 电子表格操作</a:t>
             </a:r>
             <a:endParaRPr lang="en-US" sz="1000" dirty="0"/>
           </a:p>
@@ -3300,14 +3564,14 @@
       </p:sp>
       <p:sp>
         <p:nvSpPr>
-          <p:cNvPr id="30" name="Text 28"/>
-          <p:cNvSpPr/>
-          <p:nvPr/>
-        </p:nvSpPr>
-        <p:spPr>
-          <a:xfrm>
-            <a:off x="7406640" y="2468880"/>
-            <a:ext cx="1371600" cy="731520"/>
+          <p:cNvPr id="38" name="Text 36"/>
+          <p:cNvSpPr/>
+          <p:nvPr/>
+        </p:nvSpPr>
+        <p:spPr>
+          <a:xfrm>
+            <a:off x="7452360" y="2377440"/>
+            <a:ext cx="1417320" cy="548640"/>
           </a:xfrm>
           <a:prstGeom prst="rect">
             <a:avLst/>
@@ -3323,7 +3587,7 @@
               <a:buNone/>
             </a:pPr>
             <a:r>
-              <a:rPr lang="en-US" sz="900" dirty="0">
+              <a:rPr lang="en-US" sz="800" dirty="0">
                 <a:solidFill>
                   <a:srgbClr val="8B949E"/>
                 </a:solidFill>
@@ -3331,26 +3595,92 @@
                 <a:ea typeface="Arial" pitchFamily="34" charset="-122"/>
                 <a:cs typeface="Arial" pitchFamily="34" charset="-120"/>
               </a:rPr>
-              <a:t>基于 CDP 协议</a:t>
-            </a:r>
-            <a:endParaRPr lang="en-US" sz="900" dirty="0"/>
-          </a:p>
-        </p:txBody>
-      </p:sp>
-      <p:sp>
-        <p:nvSpPr>
-          <p:cNvPr id="31" name="Shape 29"/>
-          <p:cNvSpPr/>
-          <p:nvPr/>
-        </p:nvSpPr>
-        <p:spPr>
-          <a:xfrm>
-            <a:off x="365760" y="3840480"/>
-            <a:ext cx="8412480" cy="731520"/>
+              <a:t>Python (openpyxl)</a:t>
+            </a:r>
+            <a:endParaRPr lang="en-US" sz="800" dirty="0"/>
+          </a:p>
+        </p:txBody>
+      </p:sp>
+      <p:sp>
+        <p:nvSpPr>
+          <p:cNvPr id="39" name="Shape 37"/>
+          <p:cNvSpPr/>
+          <p:nvPr/>
+        </p:nvSpPr>
+        <p:spPr>
+          <a:xfrm>
+            <a:off x="7452360" y="3108960"/>
+            <a:ext cx="914400" cy="256032"/>
           </a:xfrm>
           <a:prstGeom prst="roundRect">
             <a:avLst>
-              <a:gd name="adj" fmla="val 10000"/>
+              <a:gd name="adj" fmla="val 14286"/>
+            </a:avLst>
+          </a:prstGeom>
+          <a:solidFill>
+            <a:srgbClr val="000000"/>
+          </a:solidFill>
+          <a:ln w="6350">
+            <a:solidFill>
+              <a:srgbClr val="F85149"/>
+            </a:solidFill>
+            <a:prstDash val="solid"/>
+          </a:ln>
+        </p:spPr>
+      </p:sp>
+      <p:sp>
+        <p:nvSpPr>
+          <p:cNvPr id="40" name="Text 38"/>
+          <p:cNvSpPr/>
+          <p:nvPr/>
+        </p:nvSpPr>
+        <p:spPr>
+          <a:xfrm>
+            <a:off x="7452360" y="3108960"/>
+            <a:ext cx="914400" cy="256032"/>
+          </a:xfrm>
+          <a:prstGeom prst="rect">
+            <a:avLst/>
+          </a:prstGeom>
+          <a:noFill/>
+          <a:ln/>
+        </p:spPr>
+        <p:txBody>
+          <a:bodyPr wrap="square" lIns="0" tIns="0" rIns="0" bIns="0" rtlCol="0" anchor="ctr"/>
+          <a:lstStyle/>
+          <a:p>
+            <a:pPr algn="ctr" indent="0" marL="0">
+              <a:buNone/>
+            </a:pPr>
+            <a:r>
+              <a:rPr lang="en-US" sz="900" dirty="0">
+                <a:solidFill>
+                  <a:srgbClr val="F85149"/>
+                </a:solidFill>
+                <a:latin typeface="Arial" pitchFamily="34" charset="0"/>
+                <a:ea typeface="Arial" pitchFamily="34" charset="-122"/>
+                <a:cs typeface="Arial" pitchFamily="34" charset="-120"/>
+              </a:rPr>
+              <a:t>子进程</a:t>
+            </a:r>
+            <a:endParaRPr lang="en-US" sz="900" dirty="0"/>
+          </a:p>
+        </p:txBody>
+      </p:sp>
+      <p:sp>
+        <p:nvSpPr>
+          <p:cNvPr id="41" name="Shape 39"/>
+          <p:cNvSpPr/>
+          <p:nvPr/>
+        </p:nvSpPr>
+        <p:spPr>
+          <a:xfrm>
+            <a:off x="228600" y="3840480"/>
+            <a:ext cx="8686800" cy="914400"/>
+          </a:xfrm>
+          <a:prstGeom prst="roundRect">
+            <a:avLst>
+              <a:gd name="adj" fmla="val 8000"/>
             </a:avLst>
           </a:prstGeom>
           <a:solidFill>
@@ -3366,14 +3696,14 @@
       </p:sp>
       <p:sp>
         <p:nvSpPr>
-          <p:cNvPr id="32" name="Text 30"/>
-          <p:cNvSpPr/>
-          <p:nvPr/>
-        </p:nvSpPr>
-        <p:spPr>
-          <a:xfrm>
-            <a:off x="548640" y="3931920"/>
-            <a:ext cx="1097280" cy="274320"/>
+          <p:cNvPr id="42" name="Text 40"/>
+          <p:cNvSpPr/>
+          <p:nvPr/>
+        </p:nvSpPr>
+        <p:spPr>
+          <a:xfrm>
+            <a:off x="411480" y="3931920"/>
+            <a:ext cx="2743200" cy="274320"/>
           </a:xfrm>
           <a:prstGeom prst="rect">
             <a:avLst/>
@@ -3389,30 +3719,30 @@
               <a:buNone/>
             </a:pPr>
             <a:r>
-              <a:rPr lang="en-US" sz="1100" b="1" dirty="0">
-                <a:solidFill>
-                  <a:srgbClr val="00F7FF"/>
-                </a:solidFill>
-                <a:latin typeface="Arial" pitchFamily="34" charset="0"/>
-                <a:ea typeface="Arial" pitchFamily="34" charset="-122"/>
-                <a:cs typeface="Arial" pitchFamily="34" charset="-120"/>
-              </a:rPr>
-              <a:t>通信方式:  </a:t>
-            </a:r>
-            <a:endParaRPr lang="en-US" sz="1100" dirty="0"/>
-          </a:p>
-        </p:txBody>
-      </p:sp>
-      <p:sp>
-        <p:nvSpPr>
-          <p:cNvPr id="33" name="Text 31"/>
-          <p:cNvSpPr/>
-          <p:nvPr/>
-        </p:nvSpPr>
-        <p:spPr>
-          <a:xfrm>
-            <a:off x="1554480" y="3931920"/>
-            <a:ext cx="7040880" cy="548640"/>
+              <a:rPr lang="en-US" sz="1200" b="1" dirty="0">
+                <a:solidFill>
+                  <a:srgbClr val="D29922"/>
+                </a:solidFill>
+                <a:latin typeface="Arial" pitchFamily="34" charset="0"/>
+                <a:ea typeface="Arial" pitchFamily="34" charset="-122"/>
+                <a:cs typeface="Arial" pitchFamily="34" charset="-120"/>
+              </a:rPr>
+              <a:t>⚠  不是独立 MCP 服务进程</a:t>
+            </a:r>
+            <a:endParaRPr lang="en-US" sz="1200" dirty="0"/>
+          </a:p>
+        </p:txBody>
+      </p:sp>
+      <p:sp>
+        <p:nvSpPr>
+          <p:cNvPr id="43" name="Text 41"/>
+          <p:cNvSpPr/>
+          <p:nvPr/>
+        </p:nvSpPr>
+        <p:spPr>
+          <a:xfrm>
+            <a:off x="411480" y="4206240"/>
+            <a:ext cx="8321040" cy="457200"/>
           </a:xfrm>
           <a:prstGeom prst="rect">
             <a:avLst/>
@@ -3425,6 +3755,9 @@
           <a:lstStyle/>
           <a:p>
             <a:pPr indent="0" marL="0">
+              <a:lnSpc>
+                <a:spcPct val="130000"/>
+              </a:lnSpc>
               <a:buNone/>
             </a:pPr>
             <a:r>
@@ -3436,7 +3769,70 @@
                 <a:ea typeface="Arial" pitchFamily="34" charset="-122"/>
                 <a:cs typeface="Arial" pitchFamily="34" charset="-120"/>
               </a:rPr>
-              <a:t>Agent Tool Host ↔ MCP 子进程  |  JSON-RPC (stdin/stdout 或 HTTP)  |  标准输入接收请求 → 标准输出返回结果 → 标准错误输出日志</a:t>
+              <a:t>mcp_servers.json 配置均为空 ({}), </a:t>
+            </a:r>
+            <a:pPr indent="0" marL="0">
+              <a:lnSpc>
+                <a:spcPct val="130000"/>
+              </a:lnSpc>
+              <a:buNone/>
+            </a:pPr>
+            <a:r>
+              <a:rPr lang="en-US" sz="1000" dirty="0">
+                <a:solidFill>
+                  <a:srgbClr val="8B949E"/>
+                </a:solidFill>
+                <a:latin typeface="Arial" pitchFamily="34" charset="0"/>
+                <a:ea typeface="Arial" pitchFamily="34" charset="-122"/>
+                <a:cs typeface="Arial" pitchFamily="34" charset="-120"/>
+              </a:rPr>
+              <a:t>没有持久化的 MCP 服务端。</a:t>
+            </a:r>
+            <a:pPr indent="0" marL="0">
+              <a:lnSpc>
+                <a:spcPct val="130000"/>
+              </a:lnSpc>
+              <a:buNone/>
+            </a:pPr>
+            <a:endParaRPr lang="en-US" sz="1000" dirty="0"/>
+          </a:p>
+          <a:p>
+            <a:pPr indent="0" marL="0">
+              <a:lnSpc>
+                <a:spcPct val="130000"/>
+              </a:lnSpc>
+              <a:buNone/>
+            </a:pPr>
+            <a:r>
+              <a:rPr lang="en-US" sz="1000" dirty="0">
+                <a:solidFill>
+                  <a:srgbClr val="8B949E"/>
+                </a:solidFill>
+                <a:latin typeface="Arial" pitchFamily="34" charset="0"/>
+                <a:ea typeface="Arial" pitchFamily="34" charset="-122"/>
+                <a:cs typeface="Arial" pitchFamily="34" charset="-120"/>
+              </a:rPr>
+              <a:t>这些能力是 agent-tool-host 按需启动的子进程脚本，</a:t>
+            </a:r>
+            <a:endParaRPr lang="en-US" sz="1000" dirty="0"/>
+          </a:p>
+          <a:p>
+            <a:pPr indent="0" marL="0">
+              <a:lnSpc>
+                <a:spcPct val="130000"/>
+              </a:lnSpc>
+              <a:buNone/>
+            </a:pPr>
+            <a:r>
+              <a:rPr lang="en-US" sz="1000" dirty="0">
+                <a:solidFill>
+                  <a:srgbClr val="8B949E"/>
+                </a:solidFill>
+                <a:latin typeface="Arial" pitchFamily="34" charset="0"/>
+                <a:ea typeface="Arial" pitchFamily="34" charset="-122"/>
+                <a:cs typeface="Arial" pitchFamily="34" charset="-120"/>
+              </a:rPr>
+              <a:t>任务完成后自动退出。</a:t>
             </a:r>
             <a:endParaRPr lang="en-US" sz="1000" dirty="0"/>
           </a:p>
@@ -9065,7 +9461,7 @@
                 <a:ea typeface="Arial" pitchFamily="34" charset="-122"/>
                 <a:cs typeface="Arial" pitchFamily="34" charset="-120"/>
               </a:rPr>
-              <a:t>MCP 服务</a:t>
+              <a:t>工具技能服务</a:t>
             </a:r>
             <a:endParaRPr lang="en-US" sz="1300" dirty="0"/>
           </a:p>
@@ -9104,7 +9500,7 @@
                 <a:ea typeface="Arial" pitchFamily="34" charset="-122"/>
                 <a:cs typeface="Arial" pitchFamily="34" charset="-120"/>
               </a:rPr>
-              <a:t>内置工具服务与通信方式</a:t>
+              <a:t>按需调用的子进程脚本（浏览器/PDF/Office 等）</a:t>
             </a:r>
             <a:endParaRPr lang="en-US" sz="900" dirty="0"/>
           </a:p>
@@ -12756,7 +13152,7 @@
                 <a:ea typeface="Arial" pitchFamily="34" charset="-122"/>
                 <a:cs typeface="Arial" pitchFamily="34" charset="-120"/>
               </a:rPr>
-              <a:t>MCP Browser</a:t>
+              <a:t>browser (CDP)</a:t>
             </a:r>
             <a:endParaRPr lang="en-US" sz="1200" dirty="0"/>
           </a:p>
@@ -12795,7 +13191,7 @@
                 <a:ea typeface="Arial" pitchFamily="34" charset="-122"/>
                 <a:cs typeface="Arial" pitchFamily="34" charset="-120"/>
               </a:rPr>
-              <a:t>浏览器自动化服务</a:t>
+              <a:t>浏览器自动化 (Chrome DevTools Protocol)</a:t>
             </a:r>
             <a:endParaRPr lang="en-US" sz="900" dirty="0"/>
           </a:p>
@@ -12877,7 +13273,7 @@
                 <a:ea typeface="Arial" pitchFamily="34" charset="-122"/>
                 <a:cs typeface="Arial" pitchFamily="34" charset="-120"/>
               </a:rPr>
-              <a:t>MCP PDF</a:t>
+              <a:t>skill: pdf</a:t>
             </a:r>
             <a:endParaRPr lang="en-US" sz="1200" dirty="0"/>
           </a:p>
@@ -12998,7 +13394,7 @@
                 <a:ea typeface="Arial" pitchFamily="34" charset="-122"/>
                 <a:cs typeface="Arial" pitchFamily="34" charset="-120"/>
               </a:rPr>
-              <a:t>MCP Office</a:t>
+              <a:t>skill: office</a:t>
             </a:r>
             <a:endParaRPr lang="en-US" sz="1200" dirty="0"/>
           </a:p>
